--- a/outputs/apresentacao_ia_q_learning_parkour.pptx
+++ b/outputs/apresentacao_ia_q_learning_parkour.pptx
@@ -2,23 +2,23 @@
 <file path=ppt/presentation.xml><?xml version="1.0" encoding="utf-8"?>
 <p:presentation xmlns:p="http://schemas.openxmlformats.org/presentationml/2006/main">
   <p:sldMasterIdLst>
-    <p:sldMasterId xmlns:r="http://schemas.openxmlformats.org/officeDocument/2006/relationships" id="2147483648" r:id="Rb858fb02bb2d4bde"/>
+    <p:sldMasterId xmlns:r="http://schemas.openxmlformats.org/officeDocument/2006/relationships" id="2147483648" r:id="R24c82cb053414e34"/>
   </p:sldMasterIdLst>
   <p:notesMasterIdLst>
-    <p:notesMasterId xmlns:r="http://schemas.openxmlformats.org/officeDocument/2006/relationships" r:id="Rfc59c3b757944835"/>
+    <p:notesMasterId xmlns:r="http://schemas.openxmlformats.org/officeDocument/2006/relationships" r:id="R0190d552246d413e"/>
   </p:notesMasterIdLst>
   <p:sldIdLst>
-    <p:sldId xmlns:r="http://schemas.openxmlformats.org/officeDocument/2006/relationships" id="256" r:id="R6dad412104584e2c"/>
-    <p:sldId xmlns:r="http://schemas.openxmlformats.org/officeDocument/2006/relationships" id="257" r:id="Ra39e058a53294619"/>
-    <p:sldId xmlns:r="http://schemas.openxmlformats.org/officeDocument/2006/relationships" id="258" r:id="R3cba2db422004dc8"/>
-    <p:sldId xmlns:r="http://schemas.openxmlformats.org/officeDocument/2006/relationships" id="259" r:id="Rd5198e5d9ffb4e70"/>
-    <p:sldId xmlns:r="http://schemas.openxmlformats.org/officeDocument/2006/relationships" id="260" r:id="R89a40ae2dd154ce2"/>
-    <p:sldId xmlns:r="http://schemas.openxmlformats.org/officeDocument/2006/relationships" id="261" r:id="R6c7856634f264523"/>
-    <p:sldId xmlns:r="http://schemas.openxmlformats.org/officeDocument/2006/relationships" id="262" r:id="Rd732f95babe64289"/>
-    <p:sldId xmlns:r="http://schemas.openxmlformats.org/officeDocument/2006/relationships" id="263" r:id="R2c21ee1ab2734ce1"/>
-    <p:sldId xmlns:r="http://schemas.openxmlformats.org/officeDocument/2006/relationships" id="264" r:id="R143ec572a37948ae"/>
-    <p:sldId xmlns:r="http://schemas.openxmlformats.org/officeDocument/2006/relationships" id="265" r:id="Rbd326b2e89af4587"/>
-    <p:sldId xmlns:r="http://schemas.openxmlformats.org/officeDocument/2006/relationships" id="266" r:id="R6d8a36d5d2b944ea"/>
+    <p:sldId xmlns:r="http://schemas.openxmlformats.org/officeDocument/2006/relationships" id="256" r:id="R9ad88b39a652475d"/>
+    <p:sldId xmlns:r="http://schemas.openxmlformats.org/officeDocument/2006/relationships" id="257" r:id="R451167490dd649d5"/>
+    <p:sldId xmlns:r="http://schemas.openxmlformats.org/officeDocument/2006/relationships" id="258" r:id="Rb7dc2b421c51444c"/>
+    <p:sldId xmlns:r="http://schemas.openxmlformats.org/officeDocument/2006/relationships" id="259" r:id="R3f08abdee8374da1"/>
+    <p:sldId xmlns:r="http://schemas.openxmlformats.org/officeDocument/2006/relationships" id="260" r:id="R2ab8f6a6b8bc4bcd"/>
+    <p:sldId xmlns:r="http://schemas.openxmlformats.org/officeDocument/2006/relationships" id="261" r:id="Rdc0db25bab544e02"/>
+    <p:sldId xmlns:r="http://schemas.openxmlformats.org/officeDocument/2006/relationships" id="262" r:id="R189d003b8f944345"/>
+    <p:sldId xmlns:r="http://schemas.openxmlformats.org/officeDocument/2006/relationships" id="263" r:id="Rc3473ab07e5247f2"/>
+    <p:sldId xmlns:r="http://schemas.openxmlformats.org/officeDocument/2006/relationships" id="264" r:id="Rb03f45fee6f34c48"/>
+    <p:sldId xmlns:r="http://schemas.openxmlformats.org/officeDocument/2006/relationships" id="265" r:id="R1b91dccf6a4f40bc"/>
+    <p:sldId xmlns:r="http://schemas.openxmlformats.org/officeDocument/2006/relationships" id="266" r:id="Rc553ad81a57e48c9"/>
   </p:sldIdLst>
   <p:sldSz cx="12192000" cy="6858000"/>
   <p:notesSz cx="6858000" cy="9144000"/>
@@ -577,37 +577,27 @@
           <a:lstStyle xmlns:a="http://schemas.openxmlformats.org/drawingml/2006/main"/>
           <a:p xmlns:a="http://schemas.openxmlformats.org/drawingml/2006/main">
             <a:r>
-              <a:t>Responsável sugerido: Integrante 4</a:t>
-            </a:r>
-          </a:p>
-          <a:p xmlns:a="http://schemas.openxmlformats.org/drawingml/2006/main">
-            <a:r>
-              <a:t>Tempo: 1min15s</a:t>
-            </a:r>
-          </a:p>
-          <a:p xmlns:a="http://schemas.openxmlformats.org/drawingml/2006/main">
-            <a:r>
-              <a:t/>
-            </a:r>
-          </a:p>
-          <a:p xmlns:a="http://schemas.openxmlformats.org/drawingml/2006/main">
-            <a:r>
-              <a:t>Comparando os primeiros e os últimos 1.000 episódios, o retorno médio aumentou de 4,34 para 9,84 e o progresso válido de 26,3% para 34,3%.</a:t>
-            </a:r>
-          </a:p>
-          <a:p xmlns:a="http://schemas.openxmlformats.org/drawingml/2006/main">
-            <a:r>
-              <a:t>O CSV não possui linhas com fase de avaliação; todas as 3.500 linhas são de treino com epsilon 0,05.</a:t>
-            </a:r>
-          </a:p>
-          <a:p xmlns:a="http://schemas.openxmlformats.org/drawingml/2006/main">
-            <a:r>
-              <a:t>O protocolo agora é carregar a tabela, desligar exploração e aprendizado, repetir várias execuções e medir chegada, retorno e passos.</a:t>
-            </a:r>
-          </a:p>
-          <a:p xmlns:a="http://schemas.openxmlformats.org/drawingml/2006/main">
-            <a:r>
-              <a:t/>
+              <a:t>Explicar que a avaliação soma três execuções: 10 + 50 + 50 = 110 tentativas.</a:t>
+            </a:r>
+          </a:p>
+          <a:p xmlns:a="http://schemas.openxmlformats.org/drawingml/2006/main">
+            <a:r>
+              <a:t>Em todas elas, epsilon foi zero e a tabela Q permaneceu congelada; portanto, medimos a política aprendida sem exploração nem novas atualizações.</a:t>
+            </a:r>
+          </a:p>
+          <a:p xmlns:a="http://schemas.openxmlformats.org/drawingml/2006/main">
+            <a:r>
+              <a:t>Resultado consolidado: 8 chegadas, taxa de 7,27%, retorno médio 6,03, 17,09 passos médios e progresso válido médio 29,32%.</a:t>
+            </a:r>
+          </a:p>
+          <a:p xmlns:a="http://schemas.openxmlformats.org/drawingml/2006/main">
+            <a:r>
+              <a:t>As taxas individuais foram 40%, 4% e 4%. Essa variação deve ser relatada: o agregado resume todas as tentativas, mas a amostra pequena da primeira execução torna o resultado instável.</a:t>
+            </a:r>
+          </a:p>
+          <a:p xmlns:a="http://schemas.openxmlformats.org/drawingml/2006/main">
+            <a:r>
+              <a:t>A taxa de avaliação não deve ser comparada como se fosse a mesma medida do treino: no treino havia exploração e atualização da tabela; na avaliação, não.</a:t>
             </a:r>
           </a:p>
           <a:p xmlns:a="http://schemas.openxmlformats.org/drawingml/2006/main">
@@ -617,17 +607,7 @@
           </a:p>
           <a:p xmlns:a="http://schemas.openxmlformats.org/drawingml/2006/main">
             <a:r>
-              <a:t>- resultados/modelos/q_learning_labirinto_parkours_frente_1_acoes_v2_estado_v2_recompensa_v2_resultado.csv</a:t>
-            </a:r>
-          </a:p>
-          <a:p xmlns:a="http://schemas.openxmlformats.org/drawingml/2006/main">
-            <a:r>
-              <a:t>- src/parkour/q_learning.py</a:t>
-            </a:r>
-          </a:p>
-          <a:p xmlns:a="http://schemas.openxmlformats.org/drawingml/2006/main">
-            <a:r>
-              <a:t>- src/parkour/treinar.py</a:t>
+              <a:t>- resultados/modelos/q_learning_labirinto_parkours_frente_1_acoes_v2_estado_v2_recompensa_v2_resultado.csv (análise local, 17/08/2026)</a:t>
             </a:r>
           </a:p>
           <a:p xmlns:a="http://schemas.openxmlformats.org/drawingml/2006/main">
@@ -702,37 +682,17 @@
           <a:lstStyle xmlns:a="http://schemas.openxmlformats.org/drawingml/2006/main"/>
           <a:p xmlns:a="http://schemas.openxmlformats.org/drawingml/2006/main">
             <a:r>
-              <a:t>Responsável sugerido: Integrante 4</a:t>
-            </a:r>
-          </a:p>
-          <a:p xmlns:a="http://schemas.openxmlformats.org/drawingml/2006/main">
-            <a:r>
-              <a:t>Tempo: 0min45s</a:t>
-            </a:r>
-          </a:p>
-          <a:p xmlns:a="http://schemas.openxmlformats.org/drawingml/2006/main">
-            <a:r>
-              <a:t/>
-            </a:r>
-          </a:p>
-          <a:p xmlns:a="http://schemas.openxmlformats.org/drawingml/2006/main">
-            <a:r>
-              <a:t>Retomar a pergunta inicial e responder: o agente aprende porque cada transição atualiza o valor de uma ação naquele estado.</a:t>
-            </a:r>
-          </a:p>
-          <a:p xmlns:a="http://schemas.openxmlformats.org/drawingml/2006/main">
-            <a:r>
-              <a:t>Reforçar que a contribuição central é a modelagem: converter geometria e movimento contínuos em uma representação pequena o bastante para Q-Learning tabular.</a:t>
-            </a:r>
-          </a:p>
-          <a:p xmlns:a="http://schemas.openxmlformats.org/drawingml/2006/main">
-            <a:r>
-              <a:t>Encerrar com honestidade experimental: houve treino e evolução mensurável; a política ainda precisa de uma avaliação separada.</a:t>
-            </a:r>
-          </a:p>
-          <a:p xmlns:a="http://schemas.openxmlformats.org/drawingml/2006/main">
-            <a:r>
-              <a:t/>
+              <a:t>Fechar retomando as três decisões de IA: representar o ambiente, aprender valores com Bellman e medir a política separadamente.</a:t>
+            </a:r>
+          </a:p>
+          <a:p xmlns:a="http://schemas.openxmlformats.org/drawingml/2006/main">
+            <a:r>
+              <a:t>A avaliação confirma que existe uma política capaz de chegar à meta, mas 102 das 110 tentativas ainda falharam. Portanto, o desempenho permanece limitado.</a:t>
+            </a:r>
+          </a:p>
+          <a:p xmlns:a="http://schemas.openxmlformats.org/drawingml/2006/main">
+            <a:r>
+              <a:t>A formulação e a implementação funcionam; o próximo trabalho experimental seria repetir a avaliação com mais tentativas e investigar a variação entre execuções.</a:t>
             </a:r>
           </a:p>
           <a:p xmlns:a="http://schemas.openxmlformats.org/drawingml/2006/main">
@@ -742,7 +702,7 @@
           </a:p>
           <a:p xmlns:a="http://schemas.openxmlformats.org/drawingml/2006/main">
             <a:r>
-              <a:t>- Síntese de README.md e dos módulos src/parkour/</a:t>
+              <a:t>- resultados/modelos/q_learning_labirinto_parkours_frente_1_acoes_v2_estado_v2_recompensa_v2_resultado.csv (análise local, 17/08/2026)</a:t>
             </a:r>
           </a:p>
           <a:p xmlns:a="http://schemas.openxmlformats.org/drawingml/2006/main">
@@ -1850,7 +1810,7 @@
   </p:cSld>
   <p:clrMap bg1="lt1" tx1="dk1" bg2="lt2" tx2="dk2" accent1="accent1" accent2="accent2" accent3="accent3" accent4="accent4" accent5="accent5" accent6="accent6" hlink="hlink" folHlink="folHlink"/>
   <p:sldLayoutIdLst>
-    <p:sldLayoutId xmlns:r="http://schemas.openxmlformats.org/officeDocument/2006/relationships" id="2147483649" r:id="R8cf139679b0e4930"/>
+    <p:sldLayoutId xmlns:r="http://schemas.openxmlformats.org/officeDocument/2006/relationships" id="2147483649" r:id="Rb29757ae05514950"/>
   </p:sldLayoutIdLst>
   <p:txStyles>
     <p:titleStyle>
@@ -2431,6 +2391,7 @@
           <a:lstStyle xmlns:a="http://schemas.openxmlformats.org/drawingml/2006/main"/>
           <a:p xmlns:a="http://schemas.openxmlformats.org/drawingml/2006/main">
             <a:pPr>
+              <a:buNone/>
               <a:defRPr sz="1275" b="1">
                 <a:solidFill>
                   <a:srgbClr val="3D8DFF"/>
@@ -2698,6 +2659,7 @@
           <a:lstStyle xmlns:a="http://schemas.openxmlformats.org/drawingml/2006/main"/>
           <a:p xmlns:a="http://schemas.openxmlformats.org/drawingml/2006/main">
             <a:pPr>
+              <a:buNone/>
               <a:defRPr sz="1350">
                 <a:solidFill>
                   <a:srgbClr val="5B6472"/>
@@ -2723,14 +2685,14 @@
       </p:sp>
       <p:pic>
         <p:nvPicPr>
-          <p:cNvPr id="12" name=""/>
+          <p:cNvPr id="14" name=""/>
           <p:cNvPicPr>
             <a:picLocks xmlns:a="http://schemas.openxmlformats.org/drawingml/2006/main" noChangeAspect="1"/>
           </p:cNvPicPr>
           <p:nvPr/>
         </p:nvPicPr>
         <p:blipFill>
-          <a:blip xmlns:r="http://schemas.openxmlformats.org/officeDocument/2006/relationships" xmlns:a="http://schemas.openxmlformats.org/drawingml/2006/main" r:embed="R5f749471b878486f"/>
+          <a:blip xmlns:r="http://schemas.openxmlformats.org/officeDocument/2006/relationships" xmlns:a="http://schemas.openxmlformats.org/drawingml/2006/main" r:embed="Re820a52c08944747"/>
           <a:srcRect xmlns:a="http://schemas.openxmlformats.org/drawingml/2006/main" l="510" t="0" r="510" b="0"/>
           <a:stretch xmlns:a="http://schemas.openxmlformats.org/drawingml/2006/main">
             <a:fillRect l="0" t="0" r="0" b="0"/>
@@ -2812,6 +2774,7 @@
           <a:lstStyle xmlns:a="http://schemas.openxmlformats.org/drawingml/2006/main"/>
           <a:p xmlns:a="http://schemas.openxmlformats.org/drawingml/2006/main">
             <a:pPr>
+              <a:buNone/>
               <a:defRPr sz="1200" b="1">
                 <a:solidFill>
                   <a:srgbClr val="3D8DFF"/>
@@ -2892,7 +2855,7 @@
                 <a:ea typeface="Arial"/>
                 <a:cs typeface="Arial"/>
               </a:rPr>
-              <a:t>O modelo foi treinado; falta avaliar a política</a:t>
+              <a:t>A política chegou em 8 de 110 tentativas</a:t>
             </a:r>
           </a:p>
         </p:txBody>
@@ -2932,6 +2895,7 @@
           <a:lstStyle xmlns:a="http://schemas.openxmlformats.org/drawingml/2006/main"/>
           <a:p xmlns:a="http://schemas.openxmlformats.org/drawingml/2006/main">
             <a:pPr algn="r">
+              <a:buNone/>
               <a:defRPr sz="1050">
                 <a:solidFill>
                   <a:srgbClr val="5B6472"/>
@@ -2990,6 +2954,7 @@
           <a:lstStyle xmlns:a="http://schemas.openxmlformats.org/drawingml/2006/main"/>
           <a:p xmlns:a="http://schemas.openxmlformats.org/drawingml/2006/main">
             <a:pPr>
+              <a:buNone/>
               <a:defRPr sz="2250" b="1">
                 <a:solidFill>
                   <a:srgbClr val="000000"/>
@@ -3008,7 +2973,7 @@
                 <a:ea typeface="Arial"/>
                 <a:cs typeface="Arial"/>
               </a:rPr>
-              <a:t>Evidências já salvas</a:t>
+              <a:t>Condições da avaliação</a:t>
             </a:r>
           </a:p>
         </p:txBody>
@@ -3062,7 +3027,7 @@
               </a:defRPr>
             </a:pPr>
             <a:r>
-              <a:t>ε permaneceu em 0,05 no histórico limpo</a:t>
+              <a:t>3 execuções: 10 + 50 + 50 tentativas</a:t>
             </a:r>
           </a:p>
           <a:p xmlns:a="http://schemas.openxmlformats.org/drawingml/2006/main">
@@ -3081,7 +3046,7 @@
               </a:defRPr>
             </a:pPr>
             <a:r>
-              <a:t>retorno médio: 4,34 → 9,84</a:t>
+              <a:t>ε = 0 e tabela Q sem atualizações</a:t>
             </a:r>
           </a:p>
           <a:p xmlns:a="http://schemas.openxmlformats.org/drawingml/2006/main">
@@ -3100,7 +3065,7 @@
               </a:defRPr>
             </a:pPr>
             <a:r>
-              <a:t>progresso válido médio: 26,3% → 34,3%</a:t>
+              <a:t>mesmo modelo salvo nas três execuções</a:t>
             </a:r>
           </a:p>
         </p:txBody>
@@ -3140,6 +3105,7 @@
           <a:lstStyle xmlns:a="http://schemas.openxmlformats.org/drawingml/2006/main"/>
           <a:p xmlns:a="http://schemas.openxmlformats.org/drawingml/2006/main">
             <a:pPr>
+              <a:buNone/>
               <a:defRPr sz="2250" b="1">
                 <a:solidFill>
                   <a:srgbClr val="3D8DFF"/>
@@ -3158,7 +3124,7 @@
                 <a:ea typeface="Arial"/>
                 <a:cs typeface="Arial"/>
               </a:rPr>
-              <a:t>Avaliação necessária</a:t>
+              <a:t>Resultados consolidados</a:t>
             </a:r>
           </a:p>
         </p:txBody>
@@ -3212,7 +3178,7 @@
               </a:defRPr>
             </a:pPr>
             <a:r>
-              <a:t>executar o modelo salvo com ε = 0</a:t>
+              <a:t>8/110 chegadas = 7,27%</a:t>
             </a:r>
           </a:p>
           <a:p xmlns:a="http://schemas.openxmlformats.org/drawingml/2006/main">
@@ -3231,7 +3197,7 @@
               </a:defRPr>
             </a:pPr>
             <a:r>
-              <a:t>repetir várias tentativas sem atualizar Q</a:t>
+              <a:t>retorno médio: 6,03 · passos médios: 17,09</a:t>
             </a:r>
           </a:p>
           <a:p xmlns:a="http://schemas.openxmlformats.org/drawingml/2006/main">
@@ -3250,7 +3216,7 @@
               </a:defRPr>
             </a:pPr>
             <a:r>
-              <a:t>medir chegada, retorno e passos até a meta</a:t>
+              <a:t>progresso válido médio: 29,32%</a:t>
             </a:r>
           </a:p>
         </p:txBody>
@@ -3290,6 +3256,7 @@
           <a:lstStyle xmlns:a="http://schemas.openxmlformats.org/drawingml/2006/main"/>
           <a:p xmlns:a="http://schemas.openxmlformats.org/drawingml/2006/main">
             <a:pPr algn="ctr">
+              <a:buNone/>
               <a:defRPr sz="2025" b="1">
                 <a:solidFill>
                   <a:srgbClr val="000000"/>
@@ -3308,7 +3275,7 @@
                 <a:ea typeface="Arial"/>
                 <a:cs typeface="Arial"/>
               </a:rPr>
-              <a:t>Taxa durante treino com exploração ≠ desempenho final da política.</a:t>
+              <a:t>Por execução: 40,0% · 4,0% · 4,0% — há alta variação entre as amostras.</a:t>
             </a:r>
           </a:p>
         </p:txBody>
@@ -3377,6 +3344,7 @@
           <a:lstStyle xmlns:a="http://schemas.openxmlformats.org/drawingml/2006/main"/>
           <a:p xmlns:a="http://schemas.openxmlformats.org/drawingml/2006/main">
             <a:pPr>
+              <a:buNone/>
               <a:defRPr sz="1275" b="1">
                 <a:solidFill>
                   <a:srgbClr val="3D8DFF"/>
@@ -3457,7 +3425,7 @@
                 <a:ea typeface="Arial"/>
                 <a:cs typeface="Arial"/>
               </a:rPr>
-              <a:t>A IA aprende uma política porque</a:t>
+              <a:t>A política foi aprendida,</a:t>
             </a:r>
           </a:p>
           <a:p xmlns:a="http://schemas.openxmlformats.org/drawingml/2006/main">
@@ -3484,7 +3452,7 @@
                 <a:ea typeface="Arial"/>
                 <a:cs typeface="Arial"/>
               </a:rPr>
-              <a:t>cada ação produz estado, recompensa</a:t>
+              <a:t>mas a avaliação mostra desempenho</a:t>
             </a:r>
           </a:p>
           <a:p xmlns:a="http://schemas.openxmlformats.org/drawingml/2006/main">
@@ -3511,7 +3479,7 @@
                 <a:ea typeface="Arial"/>
                 <a:cs typeface="Arial"/>
               </a:rPr>
-              <a:t>e uma correção na tabela Q.</a:t>
+              <a:t>ainda instável e limitado.</a:t>
             </a:r>
           </a:p>
         </p:txBody>
@@ -3582,6 +3550,7 @@
           <a:lstStyle xmlns:a="http://schemas.openxmlformats.org/drawingml/2006/main"/>
           <a:p xmlns:a="http://schemas.openxmlformats.org/drawingml/2006/main">
             <a:pPr>
+              <a:buNone/>
               <a:defRPr sz="1500" b="1">
                 <a:solidFill>
                   <a:srgbClr val="3D8DFF"/>
@@ -3702,6 +3671,7 @@
           <a:lstStyle xmlns:a="http://schemas.openxmlformats.org/drawingml/2006/main"/>
           <a:p xmlns:a="http://schemas.openxmlformats.org/drawingml/2006/main">
             <a:pPr>
+              <a:buNone/>
               <a:defRPr sz="1500" b="1">
                 <a:solidFill>
                   <a:srgbClr val="3D8DFF"/>
@@ -3822,6 +3792,7 @@
           <a:lstStyle xmlns:a="http://schemas.openxmlformats.org/drawingml/2006/main"/>
           <a:p xmlns:a="http://schemas.openxmlformats.org/drawingml/2006/main">
             <a:pPr>
+              <a:buNone/>
               <a:defRPr sz="1500" b="1">
                 <a:solidFill>
                   <a:srgbClr val="3D8DFF"/>
@@ -3902,7 +3873,7 @@
                 <a:ea typeface="Arial"/>
                 <a:cs typeface="Arial"/>
               </a:rPr>
-              <a:t>Carregar o modelo salvo e medir a política com ε = 0.</a:t>
+              <a:t>Com ε = 0, foram 8 chegadas em 110 tentativas: 7,27%.</a:t>
             </a:r>
           </a:p>
         </p:txBody>
@@ -3971,6 +3942,7 @@
           <a:lstStyle xmlns:a="http://schemas.openxmlformats.org/drawingml/2006/main"/>
           <a:p xmlns:a="http://schemas.openxmlformats.org/drawingml/2006/main">
             <a:pPr>
+              <a:buNone/>
               <a:defRPr sz="1200" b="1">
                 <a:solidFill>
                   <a:srgbClr val="3D8DFF"/>
@@ -4091,6 +4063,7 @@
           <a:lstStyle xmlns:a="http://schemas.openxmlformats.org/drawingml/2006/main"/>
           <a:p xmlns:a="http://schemas.openxmlformats.org/drawingml/2006/main">
             <a:pPr algn="r">
+              <a:buNone/>
               <a:defRPr sz="1050">
                 <a:solidFill>
                   <a:srgbClr val="5B6472"/>
@@ -4330,6 +4303,7 @@
           <a:lstStyle xmlns:a="http://schemas.openxmlformats.org/drawingml/2006/main"/>
           <a:p xmlns:a="http://schemas.openxmlformats.org/drawingml/2006/main">
             <a:pPr>
+              <a:buNone/>
               <a:defRPr sz="2175" b="1">
                 <a:solidFill>
                   <a:srgbClr val="000000"/>
@@ -4419,6 +4393,7 @@
           <a:lstStyle xmlns:a="http://schemas.openxmlformats.org/drawingml/2006/main"/>
           <a:p xmlns:a="http://schemas.openxmlformats.org/drawingml/2006/main">
             <a:pPr>
+              <a:buNone/>
               <a:defRPr sz="1500" b="1">
                 <a:solidFill>
                   <a:srgbClr val="3D8DFF"/>
@@ -4477,6 +4452,7 @@
           <a:lstStyle xmlns:a="http://schemas.openxmlformats.org/drawingml/2006/main"/>
           <a:p xmlns:a="http://schemas.openxmlformats.org/drawingml/2006/main">
             <a:pPr>
+              <a:buNone/>
               <a:defRPr sz="1800" b="1">
                 <a:solidFill>
                   <a:srgbClr val="000000"/>
@@ -4535,6 +4511,7 @@
           <a:lstStyle xmlns:a="http://schemas.openxmlformats.org/drawingml/2006/main"/>
           <a:p xmlns:a="http://schemas.openxmlformats.org/drawingml/2006/main">
             <a:pPr algn="r">
+              <a:buNone/>
               <a:defRPr sz="1575">
                 <a:solidFill>
                   <a:srgbClr val="5B6472"/>
@@ -4624,6 +4601,7 @@
           <a:lstStyle xmlns:a="http://schemas.openxmlformats.org/drawingml/2006/main"/>
           <a:p xmlns:a="http://schemas.openxmlformats.org/drawingml/2006/main">
             <a:pPr>
+              <a:buNone/>
               <a:defRPr sz="1500" b="1">
                 <a:solidFill>
                   <a:srgbClr val="3D8DFF"/>
@@ -4682,6 +4660,7 @@
           <a:lstStyle xmlns:a="http://schemas.openxmlformats.org/drawingml/2006/main"/>
           <a:p xmlns:a="http://schemas.openxmlformats.org/drawingml/2006/main">
             <a:pPr>
+              <a:buNone/>
               <a:defRPr sz="1800" b="1">
                 <a:solidFill>
                   <a:srgbClr val="000000"/>
@@ -4740,6 +4719,7 @@
           <a:lstStyle xmlns:a="http://schemas.openxmlformats.org/drawingml/2006/main"/>
           <a:p xmlns:a="http://schemas.openxmlformats.org/drawingml/2006/main">
             <a:pPr algn="r">
+              <a:buNone/>
               <a:defRPr sz="1575">
                 <a:solidFill>
                   <a:srgbClr val="5B6472"/>
@@ -4829,6 +4809,7 @@
           <a:lstStyle xmlns:a="http://schemas.openxmlformats.org/drawingml/2006/main"/>
           <a:p xmlns:a="http://schemas.openxmlformats.org/drawingml/2006/main">
             <a:pPr>
+              <a:buNone/>
               <a:defRPr sz="1500" b="1">
                 <a:solidFill>
                   <a:srgbClr val="3D8DFF"/>
@@ -4887,6 +4868,7 @@
           <a:lstStyle xmlns:a="http://schemas.openxmlformats.org/drawingml/2006/main"/>
           <a:p xmlns:a="http://schemas.openxmlformats.org/drawingml/2006/main">
             <a:pPr>
+              <a:buNone/>
               <a:defRPr sz="1800" b="1">
                 <a:solidFill>
                   <a:srgbClr val="000000"/>
@@ -4945,6 +4927,7 @@
           <a:lstStyle xmlns:a="http://schemas.openxmlformats.org/drawingml/2006/main"/>
           <a:p xmlns:a="http://schemas.openxmlformats.org/drawingml/2006/main">
             <a:pPr algn="r">
+              <a:buNone/>
               <a:defRPr sz="1575">
                 <a:solidFill>
                   <a:srgbClr val="5B6472"/>
@@ -5034,6 +5017,7 @@
           <a:lstStyle xmlns:a="http://schemas.openxmlformats.org/drawingml/2006/main"/>
           <a:p xmlns:a="http://schemas.openxmlformats.org/drawingml/2006/main">
             <a:pPr>
+              <a:buNone/>
               <a:defRPr sz="1500" b="1">
                 <a:solidFill>
                   <a:srgbClr val="3D8DFF"/>
@@ -5092,6 +5076,7 @@
           <a:lstStyle xmlns:a="http://schemas.openxmlformats.org/drawingml/2006/main"/>
           <a:p xmlns:a="http://schemas.openxmlformats.org/drawingml/2006/main">
             <a:pPr>
+              <a:buNone/>
               <a:defRPr sz="1800" b="1">
                 <a:solidFill>
                   <a:srgbClr val="000000"/>
@@ -5150,6 +5135,7 @@
           <a:lstStyle xmlns:a="http://schemas.openxmlformats.org/drawingml/2006/main"/>
           <a:p xmlns:a="http://schemas.openxmlformats.org/drawingml/2006/main">
             <a:pPr algn="r">
+              <a:buNone/>
               <a:defRPr sz="1575">
                 <a:solidFill>
                   <a:srgbClr val="5B6472"/>
@@ -5237,6 +5223,7 @@
           <a:lstStyle xmlns:a="http://schemas.openxmlformats.org/drawingml/2006/main"/>
           <a:p xmlns:a="http://schemas.openxmlformats.org/drawingml/2006/main">
             <a:pPr>
+              <a:buNone/>
               <a:defRPr sz="1200" b="1">
                 <a:solidFill>
                   <a:srgbClr val="3D8DFF"/>
@@ -5357,6 +5344,7 @@
           <a:lstStyle xmlns:a="http://schemas.openxmlformats.org/drawingml/2006/main"/>
           <a:p xmlns:a="http://schemas.openxmlformats.org/drawingml/2006/main">
             <a:pPr algn="r">
+              <a:buNone/>
               <a:defRPr sz="1050">
                 <a:solidFill>
                   <a:srgbClr val="5B6472"/>
@@ -5415,6 +5403,7 @@
           <a:lstStyle xmlns:a="http://schemas.openxmlformats.org/drawingml/2006/main"/>
           <a:p xmlns:a="http://schemas.openxmlformats.org/drawingml/2006/main">
             <a:pPr>
+              <a:buNone/>
               <a:defRPr sz="1725">
                 <a:solidFill>
                   <a:srgbClr val="5B6472"/>
@@ -5537,6 +5526,7 @@
           <a:lstStyle xmlns:a="http://schemas.openxmlformats.org/drawingml/2006/main"/>
           <a:p xmlns:a="http://schemas.openxmlformats.org/drawingml/2006/main">
             <a:pPr>
+              <a:buNone/>
               <a:defRPr sz="1425" b="1">
                 <a:solidFill>
                   <a:srgbClr val="3D8DFF"/>
@@ -5595,6 +5585,7 @@
           <a:lstStyle xmlns:a="http://schemas.openxmlformats.org/drawingml/2006/main"/>
           <a:p xmlns:a="http://schemas.openxmlformats.org/drawingml/2006/main">
             <a:pPr>
+              <a:buNone/>
               <a:defRPr sz="2250" b="1">
                 <a:solidFill>
                   <a:srgbClr val="000000"/>
@@ -5775,6 +5766,7 @@
           <a:lstStyle xmlns:a="http://schemas.openxmlformats.org/drawingml/2006/main"/>
           <a:p xmlns:a="http://schemas.openxmlformats.org/drawingml/2006/main">
             <a:pPr>
+              <a:buNone/>
               <a:defRPr sz="1425" b="1">
                 <a:solidFill>
                   <a:srgbClr val="3D8DFF"/>
@@ -5833,6 +5825,7 @@
           <a:lstStyle xmlns:a="http://schemas.openxmlformats.org/drawingml/2006/main"/>
           <a:p xmlns:a="http://schemas.openxmlformats.org/drawingml/2006/main">
             <a:pPr>
+              <a:buNone/>
               <a:defRPr sz="2250" b="1">
                 <a:solidFill>
                   <a:srgbClr val="000000"/>
@@ -6013,6 +6006,7 @@
           <a:lstStyle xmlns:a="http://schemas.openxmlformats.org/drawingml/2006/main"/>
           <a:p xmlns:a="http://schemas.openxmlformats.org/drawingml/2006/main">
             <a:pPr>
+              <a:buNone/>
               <a:defRPr sz="1425" b="1">
                 <a:solidFill>
                   <a:srgbClr val="3D8DFF"/>
@@ -6071,6 +6065,7 @@
           <a:lstStyle xmlns:a="http://schemas.openxmlformats.org/drawingml/2006/main"/>
           <a:p xmlns:a="http://schemas.openxmlformats.org/drawingml/2006/main">
             <a:pPr>
+              <a:buNone/>
               <a:defRPr sz="2250" b="1">
                 <a:solidFill>
                   <a:srgbClr val="000000"/>
@@ -6218,6 +6213,7 @@
           <a:lstStyle xmlns:a="http://schemas.openxmlformats.org/drawingml/2006/main"/>
           <a:p xmlns:a="http://schemas.openxmlformats.org/drawingml/2006/main">
             <a:pPr>
+              <a:buNone/>
               <a:defRPr sz="1875" b="1">
                 <a:solidFill>
                   <a:srgbClr val="000000"/>
@@ -6305,6 +6301,7 @@
           <a:lstStyle xmlns:a="http://schemas.openxmlformats.org/drawingml/2006/main"/>
           <a:p xmlns:a="http://schemas.openxmlformats.org/drawingml/2006/main">
             <a:pPr>
+              <a:buNone/>
               <a:defRPr sz="1200" b="1">
                 <a:solidFill>
                   <a:srgbClr val="3D8DFF"/>
@@ -6425,6 +6422,7 @@
           <a:lstStyle xmlns:a="http://schemas.openxmlformats.org/drawingml/2006/main"/>
           <a:p xmlns:a="http://schemas.openxmlformats.org/drawingml/2006/main">
             <a:pPr algn="r">
+              <a:buNone/>
               <a:defRPr sz="1050">
                 <a:solidFill>
                   <a:srgbClr val="5B6472"/>
@@ -6638,6 +6636,7 @@
           <a:lstStyle xmlns:a="http://schemas.openxmlformats.org/drawingml/2006/main"/>
           <a:p xmlns:a="http://schemas.openxmlformats.org/drawingml/2006/main">
             <a:pPr>
+              <a:buNone/>
               <a:defRPr sz="2100" b="1">
                 <a:solidFill>
                   <a:srgbClr val="000000"/>
@@ -6696,6 +6695,7 @@
           <a:lstStyle xmlns:a="http://schemas.openxmlformats.org/drawingml/2006/main"/>
           <a:p xmlns:a="http://schemas.openxmlformats.org/drawingml/2006/main">
             <a:pPr>
+              <a:buNone/>
               <a:defRPr sz="3975" b="1">
                 <a:solidFill>
                   <a:srgbClr val="3D8DFF"/>
@@ -6754,6 +6754,7 @@
           <a:lstStyle xmlns:a="http://schemas.openxmlformats.org/drawingml/2006/main"/>
           <a:p xmlns:a="http://schemas.openxmlformats.org/drawingml/2006/main">
             <a:pPr>
+              <a:buNone/>
               <a:defRPr sz="1500">
                 <a:solidFill>
                   <a:srgbClr val="5B6472"/>
@@ -6959,6 +6960,7 @@
           <a:lstStyle xmlns:a="http://schemas.openxmlformats.org/drawingml/2006/main"/>
           <a:p xmlns:a="http://schemas.openxmlformats.org/drawingml/2006/main">
             <a:pPr>
+              <a:buNone/>
               <a:defRPr sz="2100" b="1">
                 <a:solidFill>
                   <a:srgbClr val="000000"/>
@@ -7017,6 +7019,7 @@
           <a:lstStyle xmlns:a="http://schemas.openxmlformats.org/drawingml/2006/main"/>
           <a:p xmlns:a="http://schemas.openxmlformats.org/drawingml/2006/main">
             <a:pPr>
+              <a:buNone/>
               <a:defRPr sz="3975" b="1">
                 <a:solidFill>
                   <a:srgbClr val="3D8DFF"/>
@@ -7075,6 +7078,7 @@
           <a:lstStyle xmlns:a="http://schemas.openxmlformats.org/drawingml/2006/main"/>
           <a:p xmlns:a="http://schemas.openxmlformats.org/drawingml/2006/main">
             <a:pPr>
+              <a:buNone/>
               <a:defRPr sz="1500">
                 <a:solidFill>
                   <a:srgbClr val="5B6472"/>
@@ -7307,6 +7311,7 @@
           <a:lstStyle xmlns:a="http://schemas.openxmlformats.org/drawingml/2006/main"/>
           <a:p xmlns:a="http://schemas.openxmlformats.org/drawingml/2006/main">
             <a:pPr>
+              <a:buNone/>
               <a:defRPr sz="2100" b="1">
                 <a:solidFill>
                   <a:srgbClr val="000000"/>
@@ -7365,6 +7370,7 @@
           <a:lstStyle xmlns:a="http://schemas.openxmlformats.org/drawingml/2006/main"/>
           <a:p xmlns:a="http://schemas.openxmlformats.org/drawingml/2006/main">
             <a:pPr>
+              <a:buNone/>
               <a:defRPr sz="3975" b="1">
                 <a:solidFill>
                   <a:srgbClr val="3D8DFF"/>
@@ -7423,6 +7429,7 @@
           <a:lstStyle xmlns:a="http://schemas.openxmlformats.org/drawingml/2006/main"/>
           <a:p xmlns:a="http://schemas.openxmlformats.org/drawingml/2006/main">
             <a:pPr>
+              <a:buNone/>
               <a:defRPr sz="1500">
                 <a:solidFill>
                   <a:srgbClr val="5B6472"/>
@@ -7626,6 +7633,7 @@
           <a:lstStyle xmlns:a="http://schemas.openxmlformats.org/drawingml/2006/main"/>
           <a:p xmlns:a="http://schemas.openxmlformats.org/drawingml/2006/main">
             <a:pPr>
+              <a:buNone/>
               <a:defRPr sz="1200" b="1">
                 <a:solidFill>
                   <a:srgbClr val="3D8DFF"/>
@@ -7746,6 +7754,7 @@
           <a:lstStyle xmlns:a="http://schemas.openxmlformats.org/drawingml/2006/main"/>
           <a:p xmlns:a="http://schemas.openxmlformats.org/drawingml/2006/main">
             <a:pPr algn="r">
+              <a:buNone/>
               <a:defRPr sz="1050">
                 <a:solidFill>
                   <a:srgbClr val="5B6472"/>
@@ -7835,6 +7844,7 @@
           <a:lstStyle xmlns:a="http://schemas.openxmlformats.org/drawingml/2006/main"/>
           <a:p xmlns:a="http://schemas.openxmlformats.org/drawingml/2006/main">
             <a:pPr>
+              <a:buNone/>
               <a:defRPr sz="1275" b="1">
                 <a:solidFill>
                   <a:srgbClr val="3D8DFF"/>
@@ -7982,6 +7992,7 @@
           <a:lstStyle xmlns:a="http://schemas.openxmlformats.org/drawingml/2006/main"/>
           <a:p xmlns:a="http://schemas.openxmlformats.org/drawingml/2006/main">
             <a:pPr>
+              <a:buNone/>
               <a:defRPr sz="1875">
                 <a:solidFill>
                   <a:srgbClr val="5B6472"/>
@@ -8040,6 +8051,7 @@
           <a:lstStyle xmlns:a="http://schemas.openxmlformats.org/drawingml/2006/main"/>
           <a:p xmlns:a="http://schemas.openxmlformats.org/drawingml/2006/main">
             <a:pPr>
+              <a:buNone/>
               <a:defRPr sz="2325" b="1">
                 <a:solidFill>
                   <a:srgbClr val="000000"/>
@@ -8098,6 +8110,7 @@
           <a:lstStyle xmlns:a="http://schemas.openxmlformats.org/drawingml/2006/main"/>
           <a:p xmlns:a="http://schemas.openxmlformats.org/drawingml/2006/main">
             <a:pPr>
+              <a:buNone/>
               <a:defRPr sz="3600" b="1">
                 <a:solidFill>
                   <a:srgbClr val="3D8DFF"/>
@@ -8296,6 +8309,7 @@
           <a:lstStyle xmlns:a="http://schemas.openxmlformats.org/drawingml/2006/main"/>
           <a:p xmlns:a="http://schemas.openxmlformats.org/drawingml/2006/main">
             <a:pPr>
+              <a:buNone/>
               <a:defRPr sz="1200" b="1">
                 <a:solidFill>
                   <a:srgbClr val="3D8DFF"/>
@@ -8416,6 +8430,7 @@
           <a:lstStyle xmlns:a="http://schemas.openxmlformats.org/drawingml/2006/main"/>
           <a:p xmlns:a="http://schemas.openxmlformats.org/drawingml/2006/main">
             <a:pPr algn="r">
+              <a:buNone/>
               <a:defRPr sz="1050">
                 <a:solidFill>
                   <a:srgbClr val="5B6472"/>
@@ -8753,6 +8768,7 @@
           <a:lstStyle xmlns:a="http://schemas.openxmlformats.org/drawingml/2006/main"/>
           <a:p xmlns:a="http://schemas.openxmlformats.org/drawingml/2006/main">
             <a:pPr>
+              <a:buNone/>
               <a:defRPr sz="1500" b="1">
                 <a:solidFill>
                   <a:srgbClr val="3D8DFF"/>
@@ -8811,6 +8827,7 @@
           <a:lstStyle xmlns:a="http://schemas.openxmlformats.org/drawingml/2006/main"/>
           <a:p xmlns:a="http://schemas.openxmlformats.org/drawingml/2006/main">
             <a:pPr>
+              <a:buNone/>
               <a:defRPr sz="1875" b="1">
                 <a:solidFill>
                   <a:srgbClr val="000000"/>
@@ -8962,6 +8979,7 @@
           <a:lstStyle xmlns:a="http://schemas.openxmlformats.org/drawingml/2006/main"/>
           <a:p xmlns:a="http://schemas.openxmlformats.org/drawingml/2006/main">
             <a:pPr>
+              <a:buNone/>
               <a:defRPr sz="1500" b="1">
                 <a:solidFill>
                   <a:srgbClr val="3D8DFF"/>
@@ -9020,6 +9038,7 @@
           <a:lstStyle xmlns:a="http://schemas.openxmlformats.org/drawingml/2006/main"/>
           <a:p xmlns:a="http://schemas.openxmlformats.org/drawingml/2006/main">
             <a:pPr>
+              <a:buNone/>
               <a:defRPr sz="1875" b="1">
                 <a:solidFill>
                   <a:srgbClr val="000000"/>
@@ -9171,6 +9190,7 @@
           <a:lstStyle xmlns:a="http://schemas.openxmlformats.org/drawingml/2006/main"/>
           <a:p xmlns:a="http://schemas.openxmlformats.org/drawingml/2006/main">
             <a:pPr>
+              <a:buNone/>
               <a:defRPr sz="1500" b="1">
                 <a:solidFill>
                   <a:srgbClr val="3D8DFF"/>
@@ -9229,6 +9249,7 @@
           <a:lstStyle xmlns:a="http://schemas.openxmlformats.org/drawingml/2006/main"/>
           <a:p xmlns:a="http://schemas.openxmlformats.org/drawingml/2006/main">
             <a:pPr>
+              <a:buNone/>
               <a:defRPr sz="1875" b="1">
                 <a:solidFill>
                   <a:srgbClr val="000000"/>
@@ -9380,6 +9401,7 @@
           <a:lstStyle xmlns:a="http://schemas.openxmlformats.org/drawingml/2006/main"/>
           <a:p xmlns:a="http://schemas.openxmlformats.org/drawingml/2006/main">
             <a:pPr>
+              <a:buNone/>
               <a:defRPr sz="1500" b="1">
                 <a:solidFill>
                   <a:srgbClr val="3D8DFF"/>
@@ -9438,6 +9460,7 @@
           <a:lstStyle xmlns:a="http://schemas.openxmlformats.org/drawingml/2006/main"/>
           <a:p xmlns:a="http://schemas.openxmlformats.org/drawingml/2006/main">
             <a:pPr>
+              <a:buNone/>
               <a:defRPr sz="1875" b="1">
                 <a:solidFill>
                   <a:srgbClr val="000000"/>
@@ -9589,6 +9612,7 @@
           <a:lstStyle xmlns:a="http://schemas.openxmlformats.org/drawingml/2006/main"/>
           <a:p xmlns:a="http://schemas.openxmlformats.org/drawingml/2006/main">
             <a:pPr>
+              <a:buNone/>
               <a:defRPr sz="1500" b="1">
                 <a:solidFill>
                   <a:srgbClr val="3D8DFF"/>
@@ -9647,6 +9671,7 @@
           <a:lstStyle xmlns:a="http://schemas.openxmlformats.org/drawingml/2006/main"/>
           <a:p xmlns:a="http://schemas.openxmlformats.org/drawingml/2006/main">
             <a:pPr>
+              <a:buNone/>
               <a:defRPr sz="1875" b="1">
                 <a:solidFill>
                   <a:srgbClr val="000000"/>
@@ -9767,6 +9792,7 @@
           <a:lstStyle xmlns:a="http://schemas.openxmlformats.org/drawingml/2006/main"/>
           <a:p xmlns:a="http://schemas.openxmlformats.org/drawingml/2006/main">
             <a:pPr algn="ctr">
+              <a:buNone/>
               <a:defRPr sz="1875" b="1">
                 <a:solidFill>
                   <a:srgbClr val="000000"/>
@@ -9854,6 +9880,7 @@
           <a:lstStyle xmlns:a="http://schemas.openxmlformats.org/drawingml/2006/main"/>
           <a:p xmlns:a="http://schemas.openxmlformats.org/drawingml/2006/main">
             <a:pPr>
+              <a:buNone/>
               <a:defRPr sz="1200" b="1">
                 <a:solidFill>
                   <a:srgbClr val="3D8DFF"/>
@@ -9974,6 +10001,7 @@
           <a:lstStyle xmlns:a="http://schemas.openxmlformats.org/drawingml/2006/main"/>
           <a:p xmlns:a="http://schemas.openxmlformats.org/drawingml/2006/main">
             <a:pPr algn="r">
+              <a:buNone/>
               <a:defRPr sz="1050">
                 <a:solidFill>
                   <a:srgbClr val="5B6472"/>
@@ -10032,6 +10060,7 @@
           <a:lstStyle xmlns:a="http://schemas.openxmlformats.org/drawingml/2006/main"/>
           <a:p xmlns:a="http://schemas.openxmlformats.org/drawingml/2006/main">
             <a:pPr>
+              <a:buNone/>
               <a:defRPr sz="2175" b="1">
                 <a:solidFill>
                   <a:srgbClr val="000000"/>
@@ -10298,6 +10327,7 @@
           <a:lstStyle xmlns:a="http://schemas.openxmlformats.org/drawingml/2006/main"/>
           <a:p xmlns:a="http://schemas.openxmlformats.org/drawingml/2006/main">
             <a:pPr>
+              <a:buNone/>
               <a:defRPr sz="2175" b="1">
                 <a:solidFill>
                   <a:srgbClr val="000000"/>
@@ -10496,6 +10526,7 @@
           <a:lstStyle xmlns:a="http://schemas.openxmlformats.org/drawingml/2006/main"/>
           <a:p xmlns:a="http://schemas.openxmlformats.org/drawingml/2006/main">
             <a:pPr>
+              <a:buNone/>
               <a:defRPr sz="1200" b="1">
                 <a:solidFill>
                   <a:srgbClr val="3D8DFF"/>
@@ -10616,6 +10647,7 @@
           <a:lstStyle xmlns:a="http://schemas.openxmlformats.org/drawingml/2006/main"/>
           <a:p xmlns:a="http://schemas.openxmlformats.org/drawingml/2006/main">
             <a:pPr algn="r">
+              <a:buNone/>
               <a:defRPr sz="1050">
                 <a:solidFill>
                   <a:srgbClr val="5B6472"/>
@@ -10674,6 +10706,7 @@
           <a:lstStyle xmlns:a="http://schemas.openxmlformats.org/drawingml/2006/main"/>
           <a:p xmlns:a="http://schemas.openxmlformats.org/drawingml/2006/main">
             <a:pPr>
+              <a:buNone/>
               <a:defRPr sz="3450" b="1">
                 <a:solidFill>
                   <a:srgbClr val="000000"/>
@@ -10732,6 +10765,7 @@
           <a:lstStyle xmlns:a="http://schemas.openxmlformats.org/drawingml/2006/main"/>
           <a:p xmlns:a="http://schemas.openxmlformats.org/drawingml/2006/main">
             <a:pPr>
+              <a:buNone/>
               <a:defRPr sz="2100" b="1">
                 <a:solidFill>
                   <a:srgbClr val="3D8DFF"/>
@@ -10821,6 +10855,7 @@
           <a:lstStyle xmlns:a="http://schemas.openxmlformats.org/drawingml/2006/main"/>
           <a:p xmlns:a="http://schemas.openxmlformats.org/drawingml/2006/main">
             <a:pPr>
+              <a:buNone/>
               <a:defRPr sz="2325" b="1">
                 <a:solidFill>
                   <a:srgbClr val="000000"/>
@@ -11112,6 +11147,7 @@
           <a:lstStyle xmlns:a="http://schemas.openxmlformats.org/drawingml/2006/main"/>
           <a:p xmlns:a="http://schemas.openxmlformats.org/drawingml/2006/main">
             <a:pPr>
+              <a:buNone/>
               <a:defRPr sz="1200" b="1">
                 <a:solidFill>
                   <a:srgbClr val="3D8DFF"/>
@@ -11232,6 +11268,7 @@
           <a:lstStyle xmlns:a="http://schemas.openxmlformats.org/drawingml/2006/main"/>
           <a:p xmlns:a="http://schemas.openxmlformats.org/drawingml/2006/main">
             <a:pPr algn="r">
+              <a:buNone/>
               <a:defRPr sz="1050">
                 <a:solidFill>
                   <a:srgbClr val="5B6472"/>
@@ -11290,6 +11327,7 @@
           <a:lstStyle xmlns:a="http://schemas.openxmlformats.org/drawingml/2006/main"/>
           <a:p xmlns:a="http://schemas.openxmlformats.org/drawingml/2006/main">
             <a:pPr>
+              <a:buNone/>
               <a:defRPr sz="1725">
                 <a:solidFill>
                   <a:srgbClr val="5B6472"/>
@@ -11379,6 +11417,7 @@
           <a:lstStyle xmlns:a="http://schemas.openxmlformats.org/drawingml/2006/main"/>
           <a:p xmlns:a="http://schemas.openxmlformats.org/drawingml/2006/main">
             <a:pPr>
+              <a:buNone/>
               <a:defRPr sz="4800" b="1">
                 <a:solidFill>
                   <a:srgbClr val="3D8DFF"/>
@@ -11437,6 +11476,7 @@
           <a:lstStyle xmlns:a="http://schemas.openxmlformats.org/drawingml/2006/main"/>
           <a:p xmlns:a="http://schemas.openxmlformats.org/drawingml/2006/main">
             <a:pPr>
+              <a:buNone/>
               <a:defRPr sz="2025" b="1">
                 <a:solidFill>
                   <a:srgbClr val="000000"/>
@@ -11588,6 +11628,7 @@
           <a:lstStyle xmlns:a="http://schemas.openxmlformats.org/drawingml/2006/main"/>
           <a:p xmlns:a="http://schemas.openxmlformats.org/drawingml/2006/main">
             <a:pPr>
+              <a:buNone/>
               <a:defRPr sz="4800" b="1">
                 <a:solidFill>
                   <a:srgbClr val="3D8DFF"/>
@@ -11646,6 +11687,7 @@
           <a:lstStyle xmlns:a="http://schemas.openxmlformats.org/drawingml/2006/main"/>
           <a:p xmlns:a="http://schemas.openxmlformats.org/drawingml/2006/main">
             <a:pPr>
+              <a:buNone/>
               <a:defRPr sz="2025" b="1">
                 <a:solidFill>
                   <a:srgbClr val="000000"/>
@@ -11797,6 +11839,7 @@
           <a:lstStyle xmlns:a="http://schemas.openxmlformats.org/drawingml/2006/main"/>
           <a:p xmlns:a="http://schemas.openxmlformats.org/drawingml/2006/main">
             <a:pPr>
+              <a:buNone/>
               <a:defRPr sz="4800" b="1">
                 <a:solidFill>
                   <a:srgbClr val="3D8DFF"/>
@@ -11855,6 +11898,7 @@
           <a:lstStyle xmlns:a="http://schemas.openxmlformats.org/drawingml/2006/main"/>
           <a:p xmlns:a="http://schemas.openxmlformats.org/drawingml/2006/main">
             <a:pPr>
+              <a:buNone/>
               <a:defRPr sz="2025" b="1">
                 <a:solidFill>
                   <a:srgbClr val="000000"/>
